--- a/public/pitch/SIH26164-ECDAT-Idea-Presentation_2.pptx
+++ b/public/pitch/SIH26164-ECDAT-Idea-Presentation_2.pptx
@@ -6209,7 +6209,7 @@
             <a:pPr algn="ctr"/>
             <a:r>
               <a:rPr lang="en-US" dirty="0"/>
-              <a:t>ECDAT</a:t>
+              <a:t>ARC</a:t>
             </a:r>
             <a:endParaRPr lang="en-IN" dirty="0"/>
           </a:p>
@@ -6534,7 +6534,7 @@
             <a:pPr algn="ctr"/>
             <a:r>
               <a:rPr lang="en-US" dirty="0"/>
-              <a:t>ECDAT</a:t>
+              <a:t>ARC</a:t>
             </a:r>
             <a:endParaRPr lang="en-IN" dirty="0"/>
           </a:p>
@@ -7039,7 +7039,7 @@
             <a:pPr algn="ctr"/>
             <a:r>
               <a:rPr lang="en-US" dirty="0"/>
-              <a:t>ECDAT</a:t>
+              <a:t>ARC</a:t>
             </a:r>
             <a:endParaRPr lang="en-IN" dirty="0"/>
           </a:p>
@@ -7506,7 +7506,7 @@
             <a:pPr algn="ctr"/>
             <a:r>
               <a:rPr lang="en-US" dirty="0"/>
-              <a:t>ECDAT</a:t>
+              <a:t>ARC</a:t>
             </a:r>
             <a:endParaRPr lang="en-IN" dirty="0"/>
           </a:p>
@@ -7950,8 +7950,8 @@
           <a:p>
             <a:pPr algn="ctr"/>
             <a:r>
-              <a:rPr lang="en-US" dirty="0"/>
-              <a:t>ECDAT</a:t>
+              <a:rPr lang="en-US"/>
+              <a:t>ARC</a:t>
             </a:r>
             <a:endParaRPr lang="en-IN" dirty="0"/>
           </a:p>

--- a/public/pitch/SIH26164-ECDAT-Idea-Presentation_2.pptx
+++ b/public/pitch/SIH26164-ECDAT-Idea-Presentation_2.pptx
@@ -5984,8 +5984,8 @@
         </p:nvSpPr>
         <p:spPr bwMode="auto">
           <a:xfrm>
-            <a:off x="307760" y="1909567"/>
-            <a:ext cx="11576477" cy="4278094"/>
+            <a:off x="307760" y="1388204"/>
+            <a:ext cx="11576477" cy="3289495"/>
           </a:xfrm>
           <a:prstGeom prst="rect">
             <a:avLst/>
@@ -6040,19 +6040,6 @@
             </a:endParaRPr>
           </a:p>
           <a:p>
-            <a:pPr marL="342900" indent="-342900">
-              <a:buFont typeface="Arial" panose="020B0604020202020204" pitchFamily="34" charset="0"/>
-              <a:buChar char="•"/>
-            </a:pPr>
-            <a:endParaRPr lang="en-US" sz="2000" u="sng" dirty="0">
-              <a:solidFill>
-                <a:schemeClr val="tx2"/>
-              </a:solidFill>
-              <a:latin typeface="Arial" pitchFamily="34" charset="0"/>
-              <a:cs typeface="Arial" pitchFamily="34" charset="0"/>
-            </a:endParaRPr>
-          </a:p>
-          <a:p>
             <a:pPr marL="342900" indent="-342900" algn="just">
               <a:buFont typeface="Arial" panose="020B0604020202020204" pitchFamily="34" charset="0"/>
               <a:buChar char="•"/>
@@ -6062,7 +6049,7 @@
                 <a:latin typeface="Arial" pitchFamily="34" charset="0"/>
                 <a:cs typeface="Arial" pitchFamily="34" charset="0"/>
               </a:rPr>
-              <a:t>Three static channels: LLVM IR FIPS/RFC tables, CFG softmax model, raw-byte S-box/K[]/sigma scan</a:t>
+              <a:t>Inventory crypto in enterprise binaries without execution kits</a:t>
             </a:r>
           </a:p>
           <a:p>
@@ -6075,20 +6062,7 @@
                 <a:latin typeface="Arial" pitchFamily="34" charset="0"/>
                 <a:cs typeface="Arial" pitchFamily="34" charset="0"/>
               </a:rPr>
-              <a:t>Addresses NTRO need: inventory crypto in enterprise binaries without execution or evasion kits</a:t>
-            </a:r>
-          </a:p>
-          <a:p>
-            <a:pPr marL="342900" indent="-342900" algn="just">
-              <a:buFont typeface="Arial" panose="020B0604020202020204" pitchFamily="34" charset="0"/>
-              <a:buChar char="•"/>
-            </a:pPr>
-            <a:r>
-              <a:rPr lang="en-US" sz="2800" dirty="0">
-                <a:latin typeface="Arial" pitchFamily="34" charset="0"/>
-                <a:cs typeface="Arial" pitchFamily="34" charset="0"/>
-              </a:rPr>
-              <a:t>Unique: IR + AI corroboration + stripped ELF/PE/.so evidence; weak MD5/SHA-1/CRC flagged</a:t>
+              <a:t>Unique: IR + AI corroboration + stripped evidence; weak flagged</a:t>
             </a:r>
           </a:p>
         </p:txBody>
@@ -6239,6 +6213,36 @@
           <a:xfrm>
             <a:off x="9780086" y="1500"/>
             <a:ext cx="2249850" cy="1062337"/>
+          </a:xfrm>
+          <a:prstGeom prst="rect">
+            <a:avLst/>
+          </a:prstGeom>
+        </p:spPr>
+      </p:pic>
+      <p:pic>
+        <p:nvPicPr>
+          <p:cNvPr id="3" name="Picture 2">
+            <a:extLst>
+              <a:ext uri="{FF2B5EF4-FFF2-40B4-BE49-F238E27FC236}">
+                <a16:creationId xmlns:a16="http://schemas.microsoft.com/office/drawing/2014/main" id="{4C3BDDFD-74D9-B70E-AF9D-312E21C42AD4}"/>
+              </a:ext>
+            </a:extLst>
+          </p:cNvPr>
+          <p:cNvPicPr>
+            <a:picLocks noChangeAspect="1"/>
+          </p:cNvPicPr>
+          <p:nvPr/>
+        </p:nvPicPr>
+        <p:blipFill>
+          <a:blip r:embed="rId4"/>
+          <a:stretch>
+            <a:fillRect/>
+          </a:stretch>
+        </p:blipFill>
+        <p:spPr>
+          <a:xfrm>
+            <a:off x="1797016" y="3636569"/>
+            <a:ext cx="7481456" cy="2719978"/>
           </a:xfrm>
           <a:prstGeom prst="rect">
             <a:avLst/>
@@ -6371,8 +6375,8 @@
         </p:nvSpPr>
         <p:spPr bwMode="auto">
           <a:xfrm>
-            <a:off x="609600" y="2533653"/>
-            <a:ext cx="9385300" cy="1815882"/>
+            <a:off x="542365" y="1807515"/>
+            <a:ext cx="4811686" cy="3244158"/>
           </a:xfrm>
           <a:prstGeom prst="rect">
             <a:avLst/>
@@ -6391,20 +6395,24 @@
           </a:bodyPr>
           <a:lstStyle/>
           <a:p>
-            <a:pPr marL="342900" indent="-342900" algn="just">
-              <a:buFont typeface="Arial" panose="020B0604020202020204" pitchFamily="34" charset="0"/>
-              <a:buChar char="•"/>
+            <a:pPr algn="just">
+              <a:lnSpc>
+                <a:spcPct val="150000"/>
+              </a:lnSpc>
             </a:pPr>
             <a:r>
               <a:rPr lang="en-US" sz="2800" dirty="0">
                 <a:latin typeface="Arial" pitchFamily="34" charset="0"/>
                 <a:cs typeface="Arial" pitchFamily="34" charset="0"/>
               </a:rPr>
-              <a:t>Tech: Clang LLVM IR · TypeScript/Next.js workbench · softmax logistic regression on CFG/opcode features</a:t>
+              <a:t>Tech Stack: </a:t>
             </a:r>
           </a:p>
           <a:p>
             <a:pPr marL="342900" indent="-342900" algn="just">
+              <a:lnSpc>
+                <a:spcPct val="150000"/>
+              </a:lnSpc>
               <a:buFont typeface="Arial" panose="020B0604020202020204" pitchFamily="34" charset="0"/>
               <a:buChar char="•"/>
             </a:pPr>
@@ -6413,7 +6421,60 @@
                 <a:latin typeface="Arial" pitchFamily="34" charset="0"/>
                 <a:cs typeface="Arial" pitchFamily="34" charset="0"/>
               </a:rPr>
-              <a:t>Flow: ingest .ll/.o/PE → IR signatures + ML + byte-scan → fused findings → JSON/HTML inventory export</a:t>
+              <a:t>Clang LLVM IR </a:t>
+            </a:r>
+          </a:p>
+          <a:p>
+            <a:pPr marL="342900" indent="-342900" algn="just">
+              <a:lnSpc>
+                <a:spcPct val="150000"/>
+              </a:lnSpc>
+              <a:buFont typeface="Arial" panose="020B0604020202020204" pitchFamily="34" charset="0"/>
+              <a:buChar char="•"/>
+            </a:pPr>
+            <a:r>
+              <a:rPr lang="en-US" sz="2800" dirty="0">
+                <a:latin typeface="Arial" pitchFamily="34" charset="0"/>
+                <a:cs typeface="Arial" pitchFamily="34" charset="0"/>
+              </a:rPr>
+              <a:t>Next.js prototype </a:t>
+            </a:r>
+          </a:p>
+          <a:p>
+            <a:pPr marL="342900" indent="-342900" algn="just">
+              <a:lnSpc>
+                <a:spcPct val="150000"/>
+              </a:lnSpc>
+              <a:buFont typeface="Arial" panose="020B0604020202020204" pitchFamily="34" charset="0"/>
+              <a:buChar char="•"/>
+            </a:pPr>
+            <a:r>
+              <a:rPr lang="en-US" sz="2800" dirty="0" err="1">
+                <a:latin typeface="Arial" pitchFamily="34" charset="0"/>
+                <a:cs typeface="Arial" pitchFamily="34" charset="0"/>
+              </a:rPr>
+              <a:t>Softmax</a:t>
+            </a:r>
+            <a:r>
+              <a:rPr lang="en-US" sz="2800" dirty="0">
+                <a:latin typeface="Arial" pitchFamily="34" charset="0"/>
+                <a:cs typeface="Arial" pitchFamily="34" charset="0"/>
+              </a:rPr>
+              <a:t> logistic regression </a:t>
+            </a:r>
+          </a:p>
+          <a:p>
+            <a:pPr algn="just">
+              <a:lnSpc>
+                <a:spcPct val="150000"/>
+              </a:lnSpc>
+            </a:pPr>
+            <a:r>
+              <a:rPr lang="en-US" sz="2800" dirty="0">
+                <a:latin typeface="Arial" pitchFamily="34" charset="0"/>
+                <a:cs typeface="Arial" pitchFamily="34" charset="0"/>
+              </a:rPr>
+              <a:t>   on CFG/opcode features </a:t>
             </a:r>
           </a:p>
         </p:txBody>
@@ -6564,6 +6625,36 @@
           <a:xfrm>
             <a:off x="9780086" y="1500"/>
             <a:ext cx="2249850" cy="1062337"/>
+          </a:xfrm>
+          <a:prstGeom prst="rect">
+            <a:avLst/>
+          </a:prstGeom>
+        </p:spPr>
+      </p:pic>
+      <p:pic>
+        <p:nvPicPr>
+          <p:cNvPr id="3" name="Picture 2">
+            <a:extLst>
+              <a:ext uri="{FF2B5EF4-FFF2-40B4-BE49-F238E27FC236}">
+                <a16:creationId xmlns:a16="http://schemas.microsoft.com/office/drawing/2014/main" id="{F899AF57-F857-1A4A-0D61-B8495D39A658}"/>
+              </a:ext>
+            </a:extLst>
+          </p:cNvPr>
+          <p:cNvPicPr>
+            <a:picLocks noChangeAspect="1"/>
+          </p:cNvPicPr>
+          <p:nvPr/>
+        </p:nvPicPr>
+        <p:blipFill>
+          <a:blip r:embed="rId4"/>
+          <a:stretch>
+            <a:fillRect/>
+          </a:stretch>
+        </p:blipFill>
+        <p:spPr>
+          <a:xfrm>
+            <a:off x="5421286" y="1042597"/>
+            <a:ext cx="6632627" cy="5073739"/>
           </a:xfrm>
           <a:prstGeom prst="rect">
             <a:avLst/>
@@ -6711,8 +6802,8 @@
         </p:nvSpPr>
         <p:spPr bwMode="auto">
           <a:xfrm>
-            <a:off x="609600" y="2533653"/>
-            <a:ext cx="9385300" cy="2677656"/>
+            <a:off x="623047" y="1807515"/>
+            <a:ext cx="9385300" cy="3890489"/>
           </a:xfrm>
           <a:prstGeom prst="rect">
             <a:avLst/>
@@ -6731,21 +6822,12 @@
           </a:bodyPr>
           <a:lstStyle/>
           <a:p>
-            <a:pPr marL="342900" marR="0" lvl="0" indent="-342900" algn="just" defTabSz="457200" rtl="0" eaLnBrk="1" fontAlgn="base" latinLnBrk="0" hangingPunct="1">
+            <a:pPr marL="914400" lvl="1" indent="-457200" algn="just">
               <a:lnSpc>
-                <a:spcPct val="100000"/>
+                <a:spcPct val="150000"/>
               </a:lnSpc>
-              <a:spcBef>
-                <a:spcPct val="0"/>
-              </a:spcBef>
-              <a:spcAft>
-                <a:spcPct val="0"/>
-              </a:spcAft>
-              <a:buClrTx/>
-              <a:buSzTx/>
               <a:buFont typeface="Arial" panose="020B0604020202020204" pitchFamily="34" charset="0"/>
               <a:buChar char="•"/>
-              <a:tabLst/>
               <a:defRPr/>
             </a:pPr>
             <a:r>
@@ -6756,7 +6838,131 @@
                 <a:latin typeface="Arial" pitchFamily="34" charset="0"/>
                 <a:cs typeface="Arial" pitchFamily="34" charset="0"/>
               </a:rPr>
-              <a:t>Feasible now: live workbench; npm run verify:all green (corpus + vendor holdout)</a:t>
+              <a:t>Following Modern Cryptographic Standards</a:t>
+            </a:r>
+          </a:p>
+          <a:p>
+            <a:pPr marL="914400" lvl="1" indent="-457200" algn="just">
+              <a:lnSpc>
+                <a:spcPct val="150000"/>
+              </a:lnSpc>
+              <a:buFont typeface="Arial" panose="020B0604020202020204" pitchFamily="34" charset="0"/>
+              <a:buChar char="•"/>
+              <a:defRPr/>
+            </a:pPr>
+            <a:r>
+              <a:rPr lang="en-US" sz="2800" dirty="0">
+                <a:solidFill>
+                  <a:prstClr val="black"/>
+                </a:solidFill>
+                <a:latin typeface="Arial" pitchFamily="34" charset="0"/>
+                <a:cs typeface="Arial" pitchFamily="34" charset="0"/>
+              </a:rPr>
+              <a:t>Working prototype</a:t>
+            </a:r>
+          </a:p>
+          <a:p>
+            <a:pPr marL="914400" lvl="1" indent="-457200" algn="just">
+              <a:lnSpc>
+                <a:spcPct val="150000"/>
+              </a:lnSpc>
+              <a:buFont typeface="Arial" panose="020B0604020202020204" pitchFamily="34" charset="0"/>
+              <a:buChar char="•"/>
+              <a:defRPr/>
+            </a:pPr>
+            <a:r>
+              <a:rPr kumimoji="0" lang="en-US" sz="2800" b="0" i="0" u="none" strike="noStrike" kern="1200" cap="none" spc="0" normalizeH="0" baseline="0" noProof="0" dirty="0">
+                <a:ln>
+                  <a:noFill/>
+                </a:ln>
+                <a:solidFill>
+                  <a:prstClr val="black"/>
+                </a:solidFill>
+                <a:effectLst/>
+                <a:uLnTx/>
+                <a:uFillTx/>
+                <a:latin typeface="Arial" pitchFamily="34" charset="0"/>
+                <a:ea typeface="ＭＳ Ｐゴシック" pitchFamily="1" charset="-128"/>
+                <a:cs typeface="Arial" pitchFamily="34" charset="0"/>
+              </a:rPr>
+              <a:t>No Sand</a:t>
+            </a:r>
+            <a:r>
+              <a:rPr lang="en-US" sz="2800" dirty="0">
+                <a:solidFill>
+                  <a:prstClr val="black"/>
+                </a:solidFill>
+                <a:latin typeface="Arial" pitchFamily="34" charset="0"/>
+                <a:cs typeface="Arial" pitchFamily="34" charset="0"/>
+              </a:rPr>
+              <a:t>boxing required</a:t>
+            </a:r>
+          </a:p>
+          <a:p>
+            <a:pPr marL="914400" lvl="1" indent="-457200" algn="just">
+              <a:lnSpc>
+                <a:spcPct val="150000"/>
+              </a:lnSpc>
+              <a:buFont typeface="Arial" panose="020B0604020202020204" pitchFamily="34" charset="0"/>
+              <a:buChar char="•"/>
+              <a:defRPr/>
+            </a:pPr>
+            <a:r>
+              <a:rPr lang="en-US" sz="2800" dirty="0">
+                <a:solidFill>
+                  <a:prstClr val="black"/>
+                </a:solidFill>
+                <a:latin typeface="Arial" pitchFamily="34" charset="0"/>
+                <a:cs typeface="Arial" pitchFamily="34" charset="0"/>
+              </a:rPr>
+              <a:t>No execution of unknown binaries</a:t>
+            </a:r>
+          </a:p>
+          <a:p>
+            <a:pPr marL="914400" lvl="1" indent="-457200" algn="just">
+              <a:lnSpc>
+                <a:spcPct val="150000"/>
+              </a:lnSpc>
+              <a:buFont typeface="Arial" panose="020B0604020202020204" pitchFamily="34" charset="0"/>
+              <a:buChar char="•"/>
+              <a:defRPr/>
+            </a:pPr>
+            <a:r>
+              <a:rPr kumimoji="0" lang="en-US" sz="2800" b="0" i="0" u="none" strike="noStrike" kern="1200" cap="none" spc="0" normalizeH="0" baseline="0" noProof="0" dirty="0">
+                <a:ln>
+                  <a:noFill/>
+                </a:ln>
+                <a:solidFill>
+                  <a:prstClr val="black"/>
+                </a:solidFill>
+                <a:effectLst/>
+                <a:uLnTx/>
+                <a:uFillTx/>
+                <a:latin typeface="Arial" pitchFamily="34" charset="0"/>
+                <a:ea typeface="ＭＳ Ｐゴシック" pitchFamily="1" charset="-128"/>
+                <a:cs typeface="Arial" pitchFamily="34" charset="0"/>
+              </a:rPr>
+              <a:t>Works offline</a:t>
+            </a:r>
+          </a:p>
+          <a:p>
+            <a:pPr marL="914400" lvl="1" indent="-457200" algn="just">
+              <a:lnSpc>
+                <a:spcPct val="150000"/>
+              </a:lnSpc>
+              <a:buFont typeface="Arial" panose="020B0604020202020204" pitchFamily="34" charset="0"/>
+              <a:buChar char="•"/>
+              <a:defRPr/>
+            </a:pPr>
+            <a:r>
+              <a:rPr lang="en-US" sz="2800" dirty="0">
+                <a:solidFill>
+                  <a:prstClr val="black"/>
+                </a:solidFill>
+                <a:latin typeface="Arial" pitchFamily="34" charset="0"/>
+                <a:cs typeface="Arial" pitchFamily="34" charset="0"/>
+              </a:rPr>
+              <a:t>Machine Independent</a:t>
             </a:r>
             <a:endParaRPr kumimoji="0" lang="en-US" sz="2800" b="0" i="0" u="none" strike="noStrike" kern="1200" cap="none" spc="0" normalizeH="0" baseline="0" noProof="0" dirty="0">
               <a:ln>
@@ -6772,71 +6978,6 @@
               <a:ea typeface="ＭＳ Ｐゴシック" pitchFamily="1" charset="-128"/>
               <a:cs typeface="Arial" pitchFamily="34" charset="0"/>
             </a:endParaRPr>
-          </a:p>
-          <a:p>
-            <a:pPr marL="342900" marR="0" lvl="0" indent="-342900" algn="just" defTabSz="457200" rtl="0" eaLnBrk="1" fontAlgn="base" latinLnBrk="0" hangingPunct="1">
-              <a:lnSpc>
-                <a:spcPct val="100000"/>
-              </a:lnSpc>
-              <a:spcBef>
-                <a:spcPct val="0"/>
-              </a:spcBef>
-              <a:spcAft>
-                <a:spcPct val="0"/>
-              </a:spcAft>
-              <a:buClrTx/>
-              <a:buSzTx/>
-              <a:buFont typeface="Arial" panose="020B0604020202020204" pitchFamily="34" charset="0"/>
-              <a:buChar char="•"/>
-              <a:tabLst/>
-              <a:defRPr/>
-            </a:pPr>
-            <a:r>
-              <a:rPr lang="en-US" sz="2800" dirty="0">
-                <a:solidFill>
-                  <a:prstClr val="black"/>
-                </a:solidFill>
-                <a:latin typeface="Arial" pitchFamily="34" charset="0"/>
-                <a:cs typeface="Arial" pitchFamily="34" charset="0"/>
-              </a:rPr>
-              <a:t>Risks: stripped firmware without IR; lab-sized ML train set vs OpenSSL/libsodium wild binaries</a:t>
-            </a:r>
-          </a:p>
-          <a:p>
-            <a:pPr marL="342900" marR="0" lvl="0" indent="-342900" algn="just" defTabSz="457200" rtl="0" eaLnBrk="1" fontAlgn="base" latinLnBrk="0" hangingPunct="1">
-              <a:lnSpc>
-                <a:spcPct val="100000"/>
-              </a:lnSpc>
-              <a:spcBef>
-                <a:spcPct val="0"/>
-              </a:spcBef>
-              <a:spcAft>
-                <a:spcPct val="0"/>
-              </a:spcAft>
-              <a:buClrTx/>
-              <a:buSzTx/>
-              <a:buFont typeface="Arial" panose="020B0604020202020204" pitchFamily="34" charset="0"/>
-              <a:buChar char="•"/>
-              <a:tabLst/>
-              <a:defRPr/>
-            </a:pPr>
-            <a:r>
-              <a:rPr kumimoji="0" lang="en-US" sz="2800" b="0" i="0" u="none" strike="noStrike" kern="1200" cap="none" spc="0" normalizeH="0" baseline="0" noProof="0" dirty="0">
-                <a:ln>
-                  <a:noFill/>
-                </a:ln>
-                <a:solidFill>
-                  <a:prstClr val="black"/>
-                </a:solidFill>
-                <a:effectLst/>
-                <a:uLnTx/>
-                <a:uFillTx/>
-                <a:latin typeface="Arial" pitchFamily="34" charset="0"/>
-                <a:ea typeface="ＭＳ Ｐゴシック" pitchFamily="1" charset="-128"/>
-                <a:cs typeface="Arial" pitchFamily="34" charset="0"/>
-              </a:rPr>
-              <a:t>Mitigate: byte-scan on blobs today; expand vendor IR holdout; roadmap firmware/PE IR lift</a:t>
-            </a:r>
           </a:p>
         </p:txBody>
       </p:sp>
@@ -7221,8 +7362,8 @@
         </p:nvSpPr>
         <p:spPr bwMode="auto">
           <a:xfrm>
-            <a:off x="609600" y="2533653"/>
-            <a:ext cx="9385300" cy="1815882"/>
+            <a:off x="609600" y="1563630"/>
+            <a:ext cx="9385300" cy="4536819"/>
           </a:xfrm>
           <a:prstGeom prst="rect">
             <a:avLst/>
@@ -7243,7 +7384,7 @@
           <a:p>
             <a:pPr marL="342900" marR="0" lvl="0" indent="-342900" algn="just" defTabSz="457200" rtl="0" eaLnBrk="1" fontAlgn="base" latinLnBrk="0" hangingPunct="1">
               <a:lnSpc>
-                <a:spcPct val="100000"/>
+                <a:spcPct val="150000"/>
               </a:lnSpc>
               <a:spcBef>
                 <a:spcPct val="0"/>
@@ -7273,13 +7414,78 @@
                 <a:ea typeface="ＭＳ Ｐゴシック" pitchFamily="1" charset="-128"/>
                 <a:cs typeface="Arial" pitchFamily="34" charset="0"/>
               </a:rPr>
-              <a:t>Audience: NTRO / enterprise AppSec — know where AES, RSA, TLS, weak hashes live in assets</a:t>
-            </a:r>
+              <a:t>Audience: NTRO / enterprise App Security </a:t>
+            </a:r>
+          </a:p>
+          <a:p>
+            <a:pPr marL="800100" lvl="1" indent="-342900" algn="just">
+              <a:lnSpc>
+                <a:spcPct val="150000"/>
+              </a:lnSpc>
+              <a:buFont typeface="Arial" panose="020B0604020202020204" pitchFamily="34" charset="0"/>
+              <a:buChar char="•"/>
+              <a:defRPr/>
+            </a:pPr>
+            <a:r>
+              <a:rPr kumimoji="0" lang="en-US" sz="2800" b="0" i="0" u="none" strike="noStrike" kern="1200" cap="none" spc="0" normalizeH="0" baseline="0" noProof="0" dirty="0">
+                <a:ln>
+                  <a:noFill/>
+                </a:ln>
+                <a:solidFill>
+                  <a:prstClr val="black"/>
+                </a:solidFill>
+                <a:effectLst/>
+                <a:uLnTx/>
+                <a:uFillTx/>
+                <a:latin typeface="Arial" pitchFamily="34" charset="0"/>
+                <a:ea typeface="ＭＳ Ｐゴシック" pitchFamily="1" charset="-128"/>
+                <a:cs typeface="Arial" pitchFamily="34" charset="0"/>
+              </a:rPr>
+              <a:t>Know where AES, RSA, TLS, weak hashes live</a:t>
+            </a:r>
+          </a:p>
+          <a:p>
+            <a:pPr marL="800100" lvl="1" indent="-342900" algn="just">
+              <a:lnSpc>
+                <a:spcPct val="150000"/>
+              </a:lnSpc>
+              <a:buFont typeface="Arial" panose="020B0604020202020204" pitchFamily="34" charset="0"/>
+              <a:buChar char="•"/>
+              <a:defRPr/>
+            </a:pPr>
+            <a:r>
+              <a:rPr lang="en-US" sz="2800" dirty="0">
+                <a:solidFill>
+                  <a:prstClr val="black"/>
+                </a:solidFill>
+                <a:latin typeface="Arial" pitchFamily="34" charset="0"/>
+                <a:cs typeface="Arial" pitchFamily="34" charset="0"/>
+              </a:rPr>
+              <a:t>“</a:t>
+            </a:r>
+            <a:r>
+              <a:rPr lang="en-IN" sz="2800" dirty="0"/>
+              <a:t>where is the crypto, and what is weak?”</a:t>
+            </a:r>
+            <a:endParaRPr kumimoji="0" lang="en-US" sz="2800" b="0" i="0" u="none" strike="noStrike" kern="1200" cap="none" spc="0" normalizeH="0" baseline="0" noProof="0" dirty="0">
+              <a:ln>
+                <a:noFill/>
+              </a:ln>
+              <a:solidFill>
+                <a:prstClr val="black"/>
+              </a:solidFill>
+              <a:effectLst/>
+              <a:uLnTx/>
+              <a:uFillTx/>
+              <a:latin typeface="Arial" pitchFamily="34" charset="0"/>
+              <a:ea typeface="ＭＳ Ｐゴシック" pitchFamily="1" charset="-128"/>
+              <a:cs typeface="Arial" pitchFamily="34" charset="0"/>
+            </a:endParaRPr>
           </a:p>
           <a:p>
             <a:pPr marL="342900" marR="0" lvl="0" indent="-342900" algn="just" defTabSz="457200" rtl="0" eaLnBrk="1" fontAlgn="base" latinLnBrk="0" hangingPunct="1">
               <a:lnSpc>
-                <a:spcPct val="100000"/>
+                <a:spcPct val="150000"/>
               </a:lnSpc>
               <a:spcBef>
                 <a:spcPct val="0"/>
@@ -7302,7 +7508,67 @@
                 <a:latin typeface="Arial" pitchFamily="34" charset="0"/>
                 <a:cs typeface="Arial" pitchFamily="34" charset="0"/>
               </a:rPr>
-              <a:t>Benefits: faster crypto audit, weak-primitive flags, SBOM-style inventory for compliance &amp; risk reduction</a:t>
+              <a:t>Benefits: </a:t>
+            </a:r>
+          </a:p>
+          <a:p>
+            <a:pPr marL="800100" lvl="1" indent="-342900" algn="just">
+              <a:lnSpc>
+                <a:spcPct val="150000"/>
+              </a:lnSpc>
+              <a:buFont typeface="Arial" panose="020B0604020202020204" pitchFamily="34" charset="0"/>
+              <a:buChar char="•"/>
+              <a:defRPr/>
+            </a:pPr>
+            <a:r>
+              <a:rPr lang="en-US" sz="2800" dirty="0">
+                <a:solidFill>
+                  <a:prstClr val="black"/>
+                </a:solidFill>
+                <a:latin typeface="Arial" pitchFamily="34" charset="0"/>
+                <a:cs typeface="Arial" pitchFamily="34" charset="0"/>
+              </a:rPr>
+              <a:t>faster crypto audit</a:t>
+            </a:r>
+          </a:p>
+          <a:p>
+            <a:pPr marL="800100" lvl="1" indent="-342900" algn="just">
+              <a:lnSpc>
+                <a:spcPct val="150000"/>
+              </a:lnSpc>
+              <a:buFont typeface="Arial" panose="020B0604020202020204" pitchFamily="34" charset="0"/>
+              <a:buChar char="•"/>
+              <a:defRPr/>
+            </a:pPr>
+            <a:r>
+              <a:rPr lang="en-US" sz="2800" dirty="0">
+                <a:solidFill>
+                  <a:prstClr val="black"/>
+                </a:solidFill>
+                <a:latin typeface="Arial" pitchFamily="34" charset="0"/>
+                <a:cs typeface="Arial" pitchFamily="34" charset="0"/>
+              </a:rPr>
+              <a:t>weak-primitive flags</a:t>
+            </a:r>
+          </a:p>
+          <a:p>
+            <a:pPr marL="800100" lvl="1" indent="-342900" algn="just">
+              <a:lnSpc>
+                <a:spcPct val="150000"/>
+              </a:lnSpc>
+              <a:buFont typeface="Arial" panose="020B0604020202020204" pitchFamily="34" charset="0"/>
+              <a:buChar char="•"/>
+              <a:defRPr/>
+            </a:pPr>
+            <a:r>
+              <a:rPr lang="en-US" sz="2800" dirty="0">
+                <a:solidFill>
+                  <a:prstClr val="black"/>
+                </a:solidFill>
+                <a:latin typeface="Arial" pitchFamily="34" charset="0"/>
+                <a:cs typeface="Arial" pitchFamily="34" charset="0"/>
+              </a:rPr>
+              <a:t>SBOM-style inventory for compliance</a:t>
             </a:r>
           </a:p>
         </p:txBody>
@@ -7688,8 +7954,8 @@
         </p:nvSpPr>
         <p:spPr bwMode="auto">
           <a:xfrm>
-            <a:off x="609600" y="2795263"/>
-            <a:ext cx="9385300" cy="1384995"/>
+            <a:off x="609600" y="1492582"/>
+            <a:ext cx="9385300" cy="6872876"/>
           </a:xfrm>
           <a:prstGeom prst="rect">
             <a:avLst/>
@@ -7710,7 +7976,7 @@
           <a:p>
             <a:pPr marL="342900" marR="0" lvl="0" indent="-342900" algn="just" defTabSz="457200" rtl="0" eaLnBrk="1" fontAlgn="base" latinLnBrk="0" hangingPunct="1">
               <a:lnSpc>
-                <a:spcPct val="100000"/>
+                <a:spcPct val="200000"/>
               </a:lnSpc>
               <a:spcBef>
                 <a:spcPct val="0"/>
@@ -7733,22 +7999,115 @@
                 <a:latin typeface="Arial" pitchFamily="34" charset="0"/>
                 <a:cs typeface="Arial" pitchFamily="34" charset="0"/>
               </a:rPr>
-              <a:t>FIPS-197/180 · RFC 7748 · NIST SP 800-38D/90A · OpenSSL/libsodium tables · SIH26164 NTRO brief · live ECDAT prototype</a:t>
-            </a:r>
-            <a:endParaRPr kumimoji="0" lang="en-US" sz="2800" b="0" i="0" u="none" strike="noStrike" kern="1200" cap="none" spc="0" normalizeH="0" baseline="0" noProof="0" dirty="0">
-              <a:ln>
-                <a:noFill/>
-              </a:ln>
+              <a:t>Standards Followed</a:t>
+            </a:r>
+          </a:p>
+          <a:p>
+            <a:pPr marL="800100" lvl="1" indent="-342900" algn="just">
+              <a:lnSpc>
+                <a:spcPct val="200000"/>
+              </a:lnSpc>
+              <a:buFont typeface="Arial" panose="020B0604020202020204" pitchFamily="34" charset="0"/>
+              <a:buChar char="•"/>
+              <a:defRPr/>
+            </a:pPr>
+            <a:r>
+              <a:rPr lang="en-US" sz="2800" noProof="0" dirty="0">
+                <a:solidFill>
+                  <a:prstClr val="black"/>
+                </a:solidFill>
+                <a:latin typeface="Arial" pitchFamily="34" charset="0"/>
+                <a:cs typeface="Arial" pitchFamily="34" charset="0"/>
+              </a:rPr>
+              <a:t>FIPS-197/180</a:t>
+            </a:r>
+          </a:p>
+          <a:p>
+            <a:pPr marL="800100" lvl="1" indent="-342900" algn="just">
+              <a:lnSpc>
+                <a:spcPct val="200000"/>
+              </a:lnSpc>
+              <a:buFont typeface="Arial" panose="020B0604020202020204" pitchFamily="34" charset="0"/>
+              <a:buChar char="•"/>
+              <a:defRPr/>
+            </a:pPr>
+            <a:r>
+              <a:rPr lang="en-US" sz="2800" noProof="0" dirty="0">
+                <a:solidFill>
+                  <a:prstClr val="black"/>
+                </a:solidFill>
+                <a:latin typeface="Arial" pitchFamily="34" charset="0"/>
+                <a:cs typeface="Arial" pitchFamily="34" charset="0"/>
+              </a:rPr>
+              <a:t>RFC 7748 </a:t>
+            </a:r>
+            <a:endParaRPr lang="en-US" sz="2800" dirty="0">
               <a:solidFill>
                 <a:prstClr val="black"/>
               </a:solidFill>
-              <a:effectLst/>
-              <a:uLnTx/>
-              <a:uFillTx/>
               <a:latin typeface="Arial" pitchFamily="34" charset="0"/>
-              <a:ea typeface="ＭＳ Ｐゴシック" pitchFamily="1" charset="-128"/>
               <a:cs typeface="Arial" pitchFamily="34" charset="0"/>
             </a:endParaRPr>
+          </a:p>
+          <a:p>
+            <a:pPr marL="800100" lvl="1" indent="-342900" algn="just">
+              <a:lnSpc>
+                <a:spcPct val="200000"/>
+              </a:lnSpc>
+              <a:buFont typeface="Arial" panose="020B0604020202020204" pitchFamily="34" charset="0"/>
+              <a:buChar char="•"/>
+              <a:defRPr/>
+            </a:pPr>
+            <a:r>
+              <a:rPr lang="en-US" sz="2800" noProof="0" dirty="0">
+                <a:solidFill>
+                  <a:prstClr val="black"/>
+                </a:solidFill>
+                <a:latin typeface="Arial" pitchFamily="34" charset="0"/>
+                <a:cs typeface="Arial" pitchFamily="34" charset="0"/>
+              </a:rPr>
+              <a:t>NIST SP</a:t>
+            </a:r>
+          </a:p>
+          <a:p>
+            <a:pPr marL="800100" lvl="1" indent="-342900" algn="just">
+              <a:lnSpc>
+                <a:spcPct val="200000"/>
+              </a:lnSpc>
+              <a:buFont typeface="Arial" panose="020B0604020202020204" pitchFamily="34" charset="0"/>
+              <a:buChar char="•"/>
+              <a:defRPr/>
+            </a:pPr>
+            <a:r>
+              <a:rPr lang="en-US" sz="2800" noProof="0" dirty="0">
+                <a:solidFill>
+                  <a:prstClr val="black"/>
+                </a:solidFill>
+                <a:latin typeface="Arial" pitchFamily="34" charset="0"/>
+                <a:cs typeface="Arial" pitchFamily="34" charset="0"/>
+              </a:rPr>
+              <a:t>OpenSSL/</a:t>
+            </a:r>
+            <a:r>
+              <a:rPr lang="en-US" sz="2800" noProof="0" dirty="0" err="1">
+                <a:solidFill>
+                  <a:prstClr val="black"/>
+                </a:solidFill>
+                <a:latin typeface="Arial" pitchFamily="34" charset="0"/>
+                <a:cs typeface="Arial" pitchFamily="34" charset="0"/>
+              </a:rPr>
+              <a:t>libsodium</a:t>
+            </a:r>
+            <a:r>
+              <a:rPr lang="en-US" sz="2800" noProof="0" dirty="0">
+                <a:solidFill>
+                  <a:prstClr val="black"/>
+                </a:solidFill>
+                <a:latin typeface="Arial" pitchFamily="34" charset="0"/>
+                <a:cs typeface="Arial" pitchFamily="34" charset="0"/>
+              </a:rPr>
+              <a:t> tables</a:t>
+            </a:r>
           </a:p>
         </p:txBody>
       </p:sp>
